--- a/public/materialy/1L/6/Prezentace k hodinám/1. Rastrová a vektorová grafika.pptx
+++ b/public/materialy/1L/6/Prezentace k hodinám/1. Rastrová a vektorová grafika.pptx
@@ -508,17 +508,50 @@
           <a:lstStyle/>
           <a:p>
             <a:r>
-              <a:t>Cíl hodiny: Student rozliší rastrový a vektorový obrázek, vysvětlí, co se s každým stane při zvětšení, a vybere vhodný typ pro zadané použití.</a:t>
-            </a:r>
-          </a:p>
-          <a:p>
-            <a:r>
-              <a:t>Soubory: Laboratoř – rastr a vektor.html, Rastr a vektor.txt</a:t>
-            </a:r>
-          </a:p>
-          <a:p>
-            <a:r>
-              <a:t>Výstup: Vyplněná část A a B souboru 02 a zdůvodnění u všech šesti zadání.</a:t>
+              <a:t>NEŽ ZAZVONÍ</a:t>
+            </a:r>
+          </a:p>
+          <a:p>
+            <a:r>
+              <a:t>Otevři Laboratoř – rastr a vektor.html na projektoru. Běží offline, obrázky má v sobě, nic se nestahuje.</a:t>
+            </a:r>
+          </a:p>
+          <a:p>
+            <a:r>
+              <a:t>Rozdej pracovní list Rastr a vektor.txt a rozbal Obrázky.zip do složky, kam studenti dosáhnou.</a:t>
+            </a:r>
+          </a:p>
+          <a:p/>
+          <a:p>
+            <a:r>
+              <a:t>CÍL HODINY</a:t>
+            </a:r>
+          </a:p>
+          <a:p>
+            <a:r>
+              <a:t>Student rozliší rastrový a vektorový obrázek, vysvětlí, co se s každým stane při zvětšení, a vybere vhodný typ pro zadané použití.</a:t>
+            </a:r>
+          </a:p>
+          <a:p/>
+          <a:p>
+            <a:r>
+              <a:t>VÝSTUP, KTERÝ VYBÍRÁŠ</a:t>
+            </a:r>
+          </a:p>
+          <a:p>
+            <a:r>
+              <a:t>Vyplněné části A a B pracovního listu Rastr a vektor.txt se zdůvodněním u všech šesti zadání.</a:t>
+            </a:r>
+          </a:p>
+          <a:p/>
+          <a:p>
+            <a:r>
+              <a:t>ROZVRŽENÍ</a:t>
+            </a:r>
+          </a:p>
+          <a:p>
+            <a:r>
+              <a:t>5 min vlastní rozhodnutí · 7 min výklad · 28 min práce · 5 min rozbor a exit ticket.</a:t>
             </a:r>
           </a:p>
         </p:txBody>
@@ -591,14 +624,47 @@
               <a:t>Čas: 0–5 minut.</a:t>
             </a:r>
           </a:p>
-          <a:p>
-            <a:r>
-              <a:t>Otázka pro studenty: Logo školy má být na vizitce i na plachtě 3 × 2 m. Jaký soubor si vyžádáš od grafika?</a:t>
-            </a:r>
-          </a:p>
-          <a:p>
-            <a:r>
-              <a:t>Postup: nech studenty rozhodnout a zapsat důvod dřív, než ukážeš řešení. Neprozrazuj správnou odpověď.</a:t>
+          <a:p/>
+          <a:p>
+            <a:r>
+              <a:t>CO ŘEKNEŠ</a:t>
+            </a:r>
+          </a:p>
+          <a:p>
+            <a:r>
+              <a:t>„Dneska začneme obráceně. Nejdřív se rozhodnete, teprve pak se to naučíte. Logo naší školy má jít na vizitku a zároveň na plachtu tři krát dva metry. Jaký soubor si vyžádáte od grafika? Napište si svou odpověď a k ní jeden konkrétní důvod. Máte dvě minuty.“</a:t>
+            </a:r>
+          </a:p>
+          <a:p>
+            <a:r>
+              <a:t>Po dvou minutách: „Otočte se ke spolužákovi a najděte bod, ve kterém se lišíte. Ne kdo má pravdu — kde se rozcházíte.“</a:t>
+            </a:r>
+          </a:p>
+          <a:p/>
+          <a:p>
+            <a:r>
+              <a:t>CO DĚLÁŠ</a:t>
+            </a:r>
+          </a:p>
+          <a:p>
+            <a:r>
+              <a:t>Choď mezi lavicemi a čti, co si píšou. Zapamatuj si dvě protichůdné odpovědi, vrátíš se k nim v rozboru na snímku 6.</a:t>
+            </a:r>
+          </a:p>
+          <a:p>
+            <a:r>
+              <a:t>Nepotvrzuj ani nevyvracej. Na každé „je to správně?“ odpověz „to zjistíš za dvacet minut“.</a:t>
+            </a:r>
+          </a:p>
+          <a:p/>
+          <a:p>
+            <a:r>
+              <a:t>POZOR</a:t>
+            </a:r>
+          </a:p>
+          <a:p>
+            <a:r>
+              <a:t>Tady se nesmí prozradit řešení. Celá hodina stojí na tom, že student má vlastní domněnku, kterou si pak sám ověří v laboratoři. Když odpověď řekneš teď, zbytek hodiny je opisování.</a:t>
             </a:r>
           </a:p>
         </p:txBody>
@@ -668,22 +734,60 @@
           <a:lstStyle/>
           <a:p>
             <a:r>
-              <a:t>Čas: 5–12 minut.</a:t>
-            </a:r>
-          </a:p>
-          <a:p>
-            <a:r>
-              <a:t>Klíčové pojmy: Rastr · Vektor · Volba typu</a:t>
-            </a:r>
-          </a:p>
-          <a:p>
-            <a:r>
-              <a:t>Zvětšení neumí doplnit informaci, která v souboru není.</a:t>
-            </a:r>
-          </a:p>
-          <a:p>
-            <a:r>
-              <a:t>Postup: vysvětli stručně, ověř porozuměním otázkou, nepřednášej déle než 7 minut.</a:t>
+              <a:t>Čas: 5–12 minut. Sedm minut je strop, ne doporučení.</a:t>
+            </a:r>
+          </a:p>
+          <a:p/>
+          <a:p>
+            <a:r>
+              <a:t>CO ŘEKNEŠ</a:t>
+            </a:r>
+          </a:p>
+          <a:p>
+            <a:r>
+              <a:t>K bodu 01: „Rastrový obrázek je mřížka pixelů. Každý má svou barvu a jejich počet je daný v okamžiku, kdy obrázek vznikne. Fotoaparát nasnímal čtyři tisíce pixelů na šířku — víc jich už nikdy nebude.“</a:t>
+            </a:r>
+          </a:p>
+          <a:p>
+            <a:r>
+              <a:t>K bodu 02: „Vektor není mřížka. Je to zápis: tady je kruh o takovém poloměru, tady křivka mezi těmihle body, tahle plocha je modrá. Obrázek se z toho zápisu vykreslí až ve chvíli, kdy ho chcete vidět — a vykreslí se přesně do velikosti, kterou zrovna potřebujete.“</a:t>
+            </a:r>
+          </a:p>
+          <a:p>
+            <a:r>
+              <a:t>K bodu 03: „Odtud plyne celé pravidlo. Co vzniklo objektivem nebo skenerem, je rastr a vektor z toho neuděláte. Co jste složili z tvarů, dělejte vektorem.“</a:t>
+            </a:r>
+          </a:p>
+          <a:p>
+            <a:r>
+              <a:t>Závěr: „Zapamatujte si jednu větu: zvětšení neumí doplnit informaci, která v souboru není.“</a:t>
+            </a:r>
+          </a:p>
+          <a:p/>
+          <a:p>
+            <a:r>
+              <a:t>CO DĚLÁŠ</a:t>
+            </a:r>
+          </a:p>
+          <a:p>
+            <a:r>
+              <a:t>Napiš tu poslední větu na tabuli a nech ji tam do konce hodiny. Budeš se na ni odvolávat u každého sporného zadání.</a:t>
+            </a:r>
+          </a:p>
+          <a:p>
+            <a:r>
+              <a:t>Než pustíš studenty k práci, ověř porozumění: „Mám fotku 200 × 200 pixelů a chci ji na plakát. Půjde to?“ Odpověď „ano, ale bude rozmazaná“ je správně. „Ano, stačí ji zvětšit“ znamená, že se máš vrátit k bodu 01.</a:t>
+            </a:r>
+          </a:p>
+          <a:p/>
+          <a:p>
+            <a:r>
+              <a:t>POZOR</a:t>
+            </a:r>
+          </a:p>
+          <a:p>
+            <a:r>
+              <a:t>Nezabíhej do formátů (JPEG, PNG, SVG) ani do komprese. To přijde v hodině 3. Tady stačí rozdíl rastr a vektor.</a:t>
             </a:r>
           </a:p>
         </p:txBody>
@@ -753,32 +857,83 @@
           <a:lstStyle/>
           <a:p>
             <a:r>
-              <a:t>Čas: 12–40 minut.</a:t>
-            </a:r>
-          </a:p>
-          <a:p>
-            <a:r>
-              <a:t>Soubory: Laboratoř – rastr a vektor.html, Rastr a vektor.txt</a:t>
-            </a:r>
-          </a:p>
-          <a:p>
-            <a:r>
-              <a:t>12–22 min – pozorování v laboratoři: ptej se, při jakém zvětšení se objeví pixely.</a:t>
-            </a:r>
-          </a:p>
-          <a:p>
-            <a:r>
-              <a:t>22–32 min – šest rozhodnutí ve dvojicích.</a:t>
-            </a:r>
-          </a:p>
-          <a:p>
-            <a:r>
-              <a:t>32–40 min – sporná zadání na tabuli; hraniční je náhledový obrázek k článku.</a:t>
-            </a:r>
-          </a:p>
-          <a:p>
-            <a:r>
-              <a:t>Výstup: Vyplněná část A a B souboru 02 a zdůvodnění u všech šesti zadání.</a:t>
+              <a:t>Čas: 12–40 minut. Nejdelší část hodiny. Ty jsi tu už jen pro dotazy.</a:t>
+            </a:r>
+          </a:p>
+          <a:p/>
+          <a:p>
+            <a:r>
+              <a:t>CO ŘEKNEŠ</a:t>
+            </a:r>
+          </a:p>
+          <a:p>
+            <a:r>
+              <a:t>„Otevřete si laboratoř a pracovní list Rastr a vektor.txt. Pracujete ve dvojici, ale píše každý sám. Do dvaadvaceti minut chci mít hotovou část A, pak jdeme na šest rozhodnutí.“</a:t>
+            </a:r>
+          </a:p>
+          <a:p/>
+          <a:p>
+            <a:r>
+              <a:t>12–22 MIN · POZOROVÁNÍ V LABORATOŘI</a:t>
+            </a:r>
+          </a:p>
+          <a:p>
+            <a:r>
+              <a:t>V modulu 01 táhnou posuvníkem až na 800 %. Obcházej a ptej se: „Při kolika procentech se ti objevily první pixely?“ Ať odpoví číslem — nutí je to dívat se, ne hádat.</a:t>
+            </a:r>
+          </a:p>
+          <a:p>
+            <a:r>
+              <a:t>Kdo je hotový dřív, dostane otázku 3 z části A: proč je logo_vektor.svg menší než logo_png.png.</a:t>
+            </a:r>
+          </a:p>
+          <a:p/>
+          <a:p>
+            <a:r>
+              <a:t>22–32 MIN · ŠEST ROZHODNUTÍ</a:t>
+            </a:r>
+          </a:p>
+          <a:p>
+            <a:r>
+              <a:t>Zadání 1 až 5 jsou jednoznačná a mají jít rychle. Trvej na tom, že u každého je napsaná věta proč. Samotné slovo „rastr“ se neuznává.</a:t>
+            </a:r>
+          </a:p>
+          <a:p/>
+          <a:p>
+            <a:r>
+              <a:t>32–40 MIN · SPORNÁ ZADÁNÍ</a:t>
+            </a:r>
+          </a:p>
+          <a:p>
+            <a:r>
+              <a:t>Hraniční je zadání 6, náhledový obrázek k článku. Obhájit jde obojí a přesně o to jde: rozhoduje, co je na obrázku, ne kde bude umístěný. Fotka je rastr, kreslená ilustrace vektor.</a:t>
+            </a:r>
+          </a:p>
+          <a:p>
+            <a:r>
+              <a:t>Nech zaznít obě odpovědi od studentů a teprve pak řekni, že správně jsou obě — pokud u nich stojí podmínka.</a:t>
+            </a:r>
+          </a:p>
+          <a:p/>
+          <a:p>
+            <a:r>
+              <a:t>VÝSTUP</a:t>
+            </a:r>
+          </a:p>
+          <a:p>
+            <a:r>
+              <a:t>Vyplněné části A a B pracovního listu se zdůvodněním u všech šesti zadání.</a:t>
+            </a:r>
+          </a:p>
+          <a:p/>
+          <a:p>
+            <a:r>
+              <a:t>KDYŽ NENÍ ČAS</a:t>
+            </a:r>
+          </a:p>
+          <a:p>
+            <a:r>
+              <a:t>Škrtni část C o trasování. Vrátíš se k ní na začátku hodiny 3, kde stejně přijde řeč na ztrátu informace.</a:t>
             </a:r>
           </a:p>
         </p:txBody>
@@ -848,27 +1003,45 @@
           <a:lstStyle/>
           <a:p>
             <a:r>
-              <a:t>Průběžná kontrola. Projdi body nahlas, studenti si odškrtávají v sešitu.</a:t>
-            </a:r>
-          </a:p>
-          <a:p>
-            <a:r>
-              <a:t>• U každého ze šesti zadání máš napsané zdůvodnění, ne jen slovo rastr nebo vektor.</a:t>
-            </a:r>
-          </a:p>
-          <a:p>
-            <a:r>
-              <a:t>• Umíš vlastními slovy říct, proč se vektor nerozpadne při zvětšení.</a:t>
-            </a:r>
-          </a:p>
-          <a:p>
-            <a:r>
-              <a:t>• Zapsal jsi velikosti obou souborů a všiml sis rozdílu.</a:t>
-            </a:r>
-          </a:p>
-          <a:p>
-            <a:r>
-              <a:t>• U hraničního případu jsi uvedl podmínku, za které by platila druhá odpověď.</a:t>
+              <a:t>Průběžná kontrola, zhruba 38. minuta.</a:t>
+            </a:r>
+          </a:p>
+          <a:p/>
+          <a:p>
+            <a:r>
+              <a:t>CO ŘEKNEŠ</a:t>
+            </a:r>
+          </a:p>
+          <a:p>
+            <a:r>
+              <a:t>„Než mi to odevzdáte, projedeme čtyři věci. Odškrtávejte si je.“</a:t>
+            </a:r>
+          </a:p>
+          <a:p>
+            <a:r>
+              <a:t>Čti body nahlas jeden po druhém a mezi nimi nech pauzu, ať mají čas doplnit, co jim chybí.</a:t>
+            </a:r>
+          </a:p>
+          <a:p/>
+          <a:p>
+            <a:r>
+              <a:t>CO DĚLÁŠ</a:t>
+            </a:r>
+          </a:p>
+          <a:p>
+            <a:r>
+              <a:t>Potíže dělá jen čtvrtý bod — podmínka u hraničního případu. Když ho nemá skoro nikdo, není to selhání třídy, ale znamení, že se k němu musíš vrátit v rozboru na dalším snímku.</a:t>
+            </a:r>
+          </a:p>
+          <a:p/>
+          <a:p>
+            <a:r>
+              <a:t>POZOR</a:t>
+            </a:r>
+          </a:p>
+          <a:p>
+            <a:r>
+              <a:t>Tohle není známkování. Je to poslední šance práci dodělat, ne soupis chyb.</a:t>
             </a:r>
           </a:p>
         </p:txBody>
@@ -938,32 +1111,60 @@
           <a:lstStyle/>
           <a:p>
             <a:r>
-              <a:t>Společný rozbor – očekávané závěry:</a:t>
-            </a:r>
-          </a:p>
-          <a:p>
-            <a:r>
-              <a:t>Rastr: Pevný počet pixelů. Zvětšením se pixely jen roztáhnou, detail nepřibude.</a:t>
-            </a:r>
-          </a:p>
-          <a:p>
-            <a:r>
-              <a:t>Vektor: Popis tvarů. Vykreslí se v jakékoli velikosti ostře, proto se hodí na loga a ikony.</a:t>
-            </a:r>
-          </a:p>
-          <a:p>
-            <a:r>
-              <a:t>Velikost souboru: Jednoduchá vektorová značka bývá výrazně menší než rastr téhož motivu.</a:t>
-            </a:r>
-          </a:p>
-          <a:p>
-            <a:r>
-              <a:t>Hranice: Fotografii nelze automatickým převodem udělat vektorovou beze ztráty; trasování ji zjednoduší.</a:t>
-            </a:r>
-          </a:p>
-          <a:p>
-            <a:r>
-              <a:t>Hodnoť postup a zdůvodnění, ne shodu s jednou formulací.</a:t>
+              <a:t>Společný rozbor, 40–43 minut.</a:t>
+            </a:r>
+          </a:p>
+          <a:p/>
+          <a:p>
+            <a:r>
+              <a:t>CO ŘEKNEŠ</a:t>
+            </a:r>
+          </a:p>
+          <a:p>
+            <a:r>
+              <a:t>Vrať se k úvodní otázce: „Na začátku hodiny jsem slyšel dvě různé odpovědi na logo na plachtě. Kdo změnil názor a proč?“</a:t>
+            </a:r>
+          </a:p>
+          <a:p>
+            <a:r>
+              <a:t>Teprve potom shrň čtyři závěry ze snímku — ale ať je vysloví studenti, ne ty. Ptej se „co se stane s rastrem při zvětšení?“ a doplň jen to, co nezazní.</a:t>
+            </a:r>
+          </a:p>
+          <a:p/>
+          <a:p>
+            <a:r>
+              <a:t>OČEKÁVANÉ ZÁVĚRY</a:t>
+            </a:r>
+          </a:p>
+          <a:p>
+            <a:r>
+              <a:t>Rastr: pevný počet pixelů, zvětšením se jen roztáhnou, detail nepřibude.</a:t>
+            </a:r>
+          </a:p>
+          <a:p>
+            <a:r>
+              <a:t>Vektor: popis tvarů, vykreslí se ostře v jakékoli velikosti, proto loga a ikony.</a:t>
+            </a:r>
+          </a:p>
+          <a:p>
+            <a:r>
+              <a:t>Velikost souboru: jednoduchá vektorová značka bývá výrazně menší než rastr téhož motivu.</a:t>
+            </a:r>
+          </a:p>
+          <a:p>
+            <a:r>
+              <a:t>Hranice: fotografii nelze automatickým převodem udělat vektorovou beze ztráty, trasování ji zjednoduší.</a:t>
+            </a:r>
+          </a:p>
+          <a:p/>
+          <a:p>
+            <a:r>
+              <a:t>POZOR</a:t>
+            </a:r>
+          </a:p>
+          <a:p>
+            <a:r>
+              <a:t>Hodnoť postup a zdůvodnění, ne shodu s jednou formulací. Student, který řekne „vektor je předpis, ne obrázek“, to pochopil líp než ten, kdo odříká definici ze snímku.</a:t>
             </a:r>
           </a:p>
         </p:txBody>
@@ -1033,17 +1234,50 @@
           <a:lstStyle/>
           <a:p>
             <a:r>
-              <a:t>Exit ticket: Kamarád chce logo klubu na tričko i na malou nálepku. Co mu doporučíš a proč?</a:t>
-            </a:r>
-          </a:p>
-          <a:p>
-            <a:r>
-              <a:t>Sbírej individuálně. Slouží jako doklad o učení každého studenta.</a:t>
-            </a:r>
-          </a:p>
-          <a:p>
-            <a:r>
-              <a:t>Očekávaná odpověď: Očekává se vektor (SVG), protože jedno zdrojové dílo poslouží pro obě velikosti bez ztráty ostrosti.</a:t>
+              <a:t>Exit ticket, poslední dvě minuty.</a:t>
+            </a:r>
+          </a:p>
+          <a:p/>
+          <a:p>
+            <a:r>
+              <a:t>CO ŘEKNEŠ</a:t>
+            </a:r>
+          </a:p>
+          <a:p>
+            <a:r>
+              <a:t>„Poslední úkol a ten jde každý sám, ne ve dvojici. Kamarád chce logo klubu na tričko i na malou nálepku. Co mu poradíš a proč? Jedna nebo dvě věty vlastními slovy.“</a:t>
+            </a:r>
+          </a:p>
+          <a:p/>
+          <a:p>
+            <a:r>
+              <a:t>CO DĚLÁŠ</a:t>
+            </a:r>
+          </a:p>
+          <a:p>
+            <a:r>
+              <a:t>Sbírej u dveří, každý odevzdá lístek. Je to doklad o učení každého jednotlivce — v části B pracovního listu se dvojice kryjí, tady ne.</a:t>
+            </a:r>
+          </a:p>
+          <a:p>
+            <a:r>
+              <a:t>Než odejdeš z učebny, přeběhni lístky očima. Kdo napsal rastr, potřebuje na začátku hodiny 2 minutu navíc.</a:t>
+            </a:r>
+          </a:p>
+          <a:p/>
+          <a:p>
+            <a:r>
+              <a:t>OČEKÁVANÁ ODPOVĚĎ</a:t>
+            </a:r>
+          </a:p>
+          <a:p>
+            <a:r>
+              <a:t>Vektor (SVG), protože z jednoho zdroje se vytiskne tričko i nálepka bez ztráty ostrosti.</a:t>
+            </a:r>
+          </a:p>
+          <a:p>
+            <a:r>
+              <a:t>Uznej i odpověď „vektor a z něj si nechá vyexportovat rastr v potřebné velikosti“ — to je vlastně přesnější popis reálného postupu.</a:t>
             </a:r>
           </a:p>
         </p:txBody>
@@ -6363,7 +6597,7 @@
                 </a:solidFill>
                 <a:latin typeface="Calibri"/>
               </a:rPr>
-              <a:t>V souboru 02 urči u každého rastr, nebo vektor, a napiš proč.</a:t>
+              <a:t>V části B pracovního listu urči u každého rastr, nebo vektor, a napiš proč.</a:t>
             </a:r>
           </a:p>
         </p:txBody>
@@ -6477,7 +6711,7 @@
                 </a:solidFill>
                 <a:latin typeface="Calibri"/>
               </a:rPr>
-              <a:t>Vyplněná část A a B souboru 02 a zdůvodnění u všech šesti zadání.</a:t>
+              <a:t>Vyplněné části A a B pracovního listu a zdůvodnění u všech šesti zadání.</a:t>
             </a:r>
           </a:p>
         </p:txBody>

--- a/public/materialy/1L/6/Prezentace k hodinám/1. Rastrová a vektorová grafika.pptx
+++ b/public/materialy/1L/6/Prezentace k hodinám/1. Rastrová a vektorová grafika.pptx
@@ -513,12 +513,12 @@
           </a:p>
           <a:p>
             <a:r>
-              <a:t>Otevři Laboratoř – rastr a vektor.html na projektoru. Běží offline, obrázky má v sobě, nic se nestahuje.</a:t>
-            </a:r>
-          </a:p>
-          <a:p>
-            <a:r>
-              <a:t>Rozdej pracovní list Rastr a vektor.txt a rozbal Obrázky.zip do složky, kam studenti dosáhnou.</a:t>
+              <a:t>Otevři Laboratoř – rastr a vektor.html na projektoru. Běží offline, obrázky má v sobě, nic se nestahuje.</a:t>
+            </a:r>
+          </a:p>
+          <a:p>
+            <a:r>
+              <a:t>Rozdej pracovní list Rastr a vektor.txt a rozbal Obrázky.zip do složky, kam studenti dosáhnou.</a:t>
             </a:r>
           </a:p>
           <a:p/>
@@ -529,7 +529,7 @@
           </a:p>
           <a:p>
             <a:r>
-              <a:t>Student rozliší rastrový a vektorový obrázek, vysvětlí, co se s každým stane při zvětšení, a vybere vhodný typ pro zadané použití.</a:t>
+              <a:t>Student rozliší rastrový a vektorový obrázek, vysvětlí, co se s každým stane při zvětšení, a vybere vhodný typ pro zadané použití.</a:t>
             </a:r>
           </a:p>
           <a:p/>
@@ -540,7 +540,7 @@
           </a:p>
           <a:p>
             <a:r>
-              <a:t>Vyplněné části A a B pracovního listu Rastr a vektor.txt se zdůvodněním u všech šesti zadání.</a:t>
+              <a:t>Vyplněné části A a B pracovního listu Rastr a vektor.txt se zdůvodněním u všech šesti zadání.</a:t>
             </a:r>
           </a:p>
           <a:p/>
@@ -551,7 +551,7 @@
           </a:p>
           <a:p>
             <a:r>
-              <a:t>5 min vlastní rozhodnutí · 7 min výklad · 28 min práce · 5 min rozbor a exit ticket.</a:t>
+              <a:t>5 min vlastní rozhodnutí · 7 min výklad · 28 min práce · 5 min rozbor a exit ticket.</a:t>
             </a:r>
           </a:p>
         </p:txBody>
@@ -632,12 +632,12 @@
           </a:p>
           <a:p>
             <a:r>
-              <a:t>„Dneska začneme obráceně. Nejdřív se rozhodnete, teprve pak se to naučíte. Logo naší školy má jít na vizitku a zároveň na plachtu tři krát dva metry. Jaký soubor si vyžádáte od grafika? Napište si svou odpověď a k ní jeden konkrétní důvod. Máte dvě minuty.“</a:t>
-            </a:r>
-          </a:p>
-          <a:p>
-            <a:r>
-              <a:t>Po dvou minutách: „Otočte se ke spolužákovi a najděte bod, ve kterém se lišíte. Ne kdo má pravdu — kde se rozcházíte.“</a:t>
+              <a:t>„Dneska začneme obráceně. Nejdřív se rozhodnete, teprve pak se to naučíte. Logo naší školy má jít na vizitku a zároveň na plachtu tři krát dva metry. Jaký soubor si vyžádáte od grafika? Napište si svou odpověď a k ní jeden konkrétní důvod. Máte dvě minuty.“</a:t>
+            </a:r>
+          </a:p>
+          <a:p>
+            <a:r>
+              <a:t>Po dvou minutách: „Otočte se ke spolužákovi a najděte bod, ve kterém se lišíte. Ne kdo má pravdu — kde se rozcházíte.“</a:t>
             </a:r>
           </a:p>
           <a:p/>
@@ -648,7 +648,7 @@
           </a:p>
           <a:p>
             <a:r>
-              <a:t>Choď mezi lavicemi a čti, co si píšou. Zapamatuj si dvě protichůdné odpovědi, vrátíš se k nim v rozboru na snímku 6.</a:t>
+              <a:t>Choď mezi lavicemi a čti, co si píšou. Zapamatuj si dvě protichůdné odpovědi, vrátíš se k nim v rozboru na snímku 6.</a:t>
             </a:r>
           </a:p>
           <a:p>
@@ -664,7 +664,7 @@
           </a:p>
           <a:p>
             <a:r>
-              <a:t>Tady se nesmí prozradit řešení. Celá hodina stojí na tom, že student má vlastní domněnku, kterou si pak sám ověří v laboratoři. Když odpověď řekneš teď, zbytek hodiny je opisování.</a:t>
+              <a:t>Tady se nesmí prozradit řešení. Celá hodina stojí na tom, že student má vlastní domněnku, kterou si pak sám ověří v laboratoři. Když odpověď řekneš teď, zbytek hodiny je opisování.</a:t>
             </a:r>
           </a:p>
         </p:txBody>
@@ -745,22 +745,22 @@
           </a:p>
           <a:p>
             <a:r>
-              <a:t>K bodu 01: „Rastrový obrázek je mřížka pixelů. Každý má svou barvu a jejich počet je daný v okamžiku, kdy obrázek vznikne. Fotoaparát nasnímal čtyři tisíce pixelů na šířku — víc jich už nikdy nebude.“</a:t>
-            </a:r>
-          </a:p>
-          <a:p>
-            <a:r>
-              <a:t>K bodu 02: „Vektor není mřížka. Je to zápis: tady je kruh o takovém poloměru, tady křivka mezi těmihle body, tahle plocha je modrá. Obrázek se z toho zápisu vykreslí až ve chvíli, kdy ho chcete vidět — a vykreslí se přesně do velikosti, kterou zrovna potřebujete.“</a:t>
-            </a:r>
-          </a:p>
-          <a:p>
-            <a:r>
-              <a:t>K bodu 03: „Odtud plyne celé pravidlo. Co vzniklo objektivem nebo skenerem, je rastr a vektor z toho neuděláte. Co jste složili z tvarů, dělejte vektorem.“</a:t>
-            </a:r>
-          </a:p>
-          <a:p>
-            <a:r>
-              <a:t>Závěr: „Zapamatujte si jednu větu: zvětšení neumí doplnit informaci, která v souboru není.“</a:t>
+              <a:t>K bodu 01: „Rastrový obrázek je mřížka pixelů. Každý má svou barvu a jejich počet je daný v okamžiku, kdy obrázek vznikne. Fotoaparát nasnímal čtyři tisíce pixelů na šířku — víc jich už nikdy nebude.“</a:t>
+            </a:r>
+          </a:p>
+          <a:p>
+            <a:r>
+              <a:t>K bodu 02: „Vektor není mřížka. Je to zápis: tady je kruh o takovém poloměru, tady křivka mezi těmihle body, tahle plocha je modrá. Obrázek se z toho zápisu vykreslí až ve chvíli, kdy ho chcete vidět — a vykreslí se přesně do velikosti, kterou zrovna potřebujete.“</a:t>
+            </a:r>
+          </a:p>
+          <a:p>
+            <a:r>
+              <a:t>K bodu 03: „Odtud plyne celé pravidlo. Co vzniklo objektivem nebo skenerem, je rastr a vektor z toho neuděláte. Co jste složili z tvarů, dělejte vektorem.“</a:t>
+            </a:r>
+          </a:p>
+          <a:p>
+            <a:r>
+              <a:t>Závěr: „Zapamatujte si jednu větu: zvětšení neumí doplnit informaci, která v souboru není.“</a:t>
             </a:r>
           </a:p>
           <a:p/>
@@ -771,12 +771,12 @@
           </a:p>
           <a:p>
             <a:r>
-              <a:t>Napiš tu poslední větu na tabuli a nech ji tam do konce hodiny. Budeš se na ni odvolávat u každého sporného zadání.</a:t>
-            </a:r>
-          </a:p>
-          <a:p>
-            <a:r>
-              <a:t>Než pustíš studenty k práci, ověř porozumění: „Mám fotku 200 × 200 pixelů a chci ji na plakát. Půjde to?“ Odpověď „ano, ale bude rozmazaná“ je správně. „Ano, stačí ji zvětšit“ znamená, že se máš vrátit k bodu 01.</a:t>
+              <a:t>Napiš tu poslední větu na tabuli a nech ji tam do konce hodiny. Budeš se na ni odvolávat u každého sporného zadání.</a:t>
+            </a:r>
+          </a:p>
+          <a:p>
+            <a:r>
+              <a:t>Než pustíš studenty k práci, ověř porozumění: „Mám fotku 200 × 200 pixelů a chci ji na plakát. Půjde to?“ Odpověď „ano, ale bude rozmazaná“ je správně. „Ano, stačí ji zvětšit“ znamená, že se máš vrátit k bodu 01.</a:t>
             </a:r>
           </a:p>
           <a:p/>
@@ -787,7 +787,7 @@
           </a:p>
           <a:p>
             <a:r>
-              <a:t>Nezabíhej do formátů (JPEG, PNG, SVG) ani do komprese. To přijde v hodině 3. Tady stačí rozdíl rastr a vektor.</a:t>
+              <a:t>Nezabíhej do formátů (JPEG, PNG, SVG) ani do komprese. To přijde v hodině 3. Tady stačí rozdíl rastr a vektor.</a:t>
             </a:r>
           </a:p>
         </p:txBody>
@@ -868,23 +868,23 @@
           </a:p>
           <a:p>
             <a:r>
-              <a:t>„Otevřete si laboratoř a pracovní list Rastr a vektor.txt. Pracujete ve dvojici, ale píše každý sám. Do dvaadvaceti minut chci mít hotovou část A, pak jdeme na šest rozhodnutí.“</a:t>
+              <a:t>„Otevřete si laboratoř a pracovní list Rastr a vektor.txt. Pracujete ve dvojici, ale píše každý sám. Do dvaadvaceti minut chci mít hotovou část A, pak jdeme na šest rozhodnutí.“</a:t>
             </a:r>
           </a:p>
           <a:p/>
           <a:p>
             <a:r>
-              <a:t>12–22 MIN · POZOROVÁNÍ V LABORATOŘI</a:t>
-            </a:r>
-          </a:p>
-          <a:p>
-            <a:r>
-              <a:t>V modulu 01 táhnou posuvníkem až na 800 %. Obcházej a ptej se: „Při kolika procentech se ti objevily první pixely?“ Ať odpoví číslem — nutí je to dívat se, ne hádat.</a:t>
-            </a:r>
-          </a:p>
-          <a:p>
-            <a:r>
-              <a:t>Kdo je hotový dřív, dostane otázku 3 z části A: proč je logo_vektor.svg menší než logo_png.png.</a:t>
+              <a:t>12–22 MIN · POZOROVÁNÍ V LABORATOŘI</a:t>
+            </a:r>
+          </a:p>
+          <a:p>
+            <a:r>
+              <a:t>V modulu 01 táhnou posuvníkem až na 800 %. Obcházej a ptej se: „Při kolika procentech se ti objevily první pixely?“ Ať odpoví číslem — nutí je to dívat se, ne hádat.</a:t>
+            </a:r>
+          </a:p>
+          <a:p>
+            <a:r>
+              <a:t>Kdo je hotový dřív, dostane otázku 3 z části A: proč je logo_vektor.svg menší než logo_png.png.</a:t>
             </a:r>
           </a:p>
           <a:p/>
@@ -895,7 +895,7 @@
           </a:p>
           <a:p>
             <a:r>
-              <a:t>Zadání 1 až 5 jsou jednoznačná a mají jít rychle. Trvej na tom, že u každého je napsaná věta proč. Samotné slovo „rastr“ se neuznává.</a:t>
+              <a:t>Zadání 1 až 5 jsou jednoznačná a mají jít rychle. Trvej na tom, že u každého je napsaná věta proč. Samotné slovo „rastr“ se neuznává.</a:t>
             </a:r>
           </a:p>
           <a:p/>
@@ -906,12 +906,12 @@
           </a:p>
           <a:p>
             <a:r>
-              <a:t>Hraniční je zadání 6, náhledový obrázek k článku. Obhájit jde obojí a přesně o to jde: rozhoduje, co je na obrázku, ne kde bude umístěný. Fotka je rastr, kreslená ilustrace vektor.</a:t>
-            </a:r>
-          </a:p>
-          <a:p>
-            <a:r>
-              <a:t>Nech zaznít obě odpovědi od studentů a teprve pak řekni, že správně jsou obě — pokud u nich stojí podmínka.</a:t>
+              <a:t>Hraniční je zadání 6, náhledový obrázek k článku. Obhájit jde obojí a přesně o to jde: rozhoduje, co je na obrázku, ne kde bude umístěný. Fotka je rastr, kreslená ilustrace vektor.</a:t>
+            </a:r>
+          </a:p>
+          <a:p>
+            <a:r>
+              <a:t>Nech zaznít obě odpovědi od studentů a teprve pak řekni, že správně jsou obě — pokud u nich stojí podmínka.</a:t>
             </a:r>
           </a:p>
           <a:p/>
@@ -922,7 +922,7 @@
           </a:p>
           <a:p>
             <a:r>
-              <a:t>Vyplněné části A a B pracovního listu se zdůvodněním u všech šesti zadání.</a:t>
+              <a:t>Vyplněné části A a B pracovního listu se zdůvodněním u všech šesti zadání.</a:t>
             </a:r>
           </a:p>
           <a:p/>
@@ -933,7 +933,7 @@
           </a:p>
           <a:p>
             <a:r>
-              <a:t>Škrtni část C o trasování. Vrátíš se k ní na začátku hodiny 3, kde stejně přijde řeč na ztrátu informace.</a:t>
+              <a:t>Škrtni část C o trasování. Vrátíš se k ní na začátku hodiny 3, kde stejně přijde řeč na ztrátu informace.</a:t>
             </a:r>
           </a:p>
         </p:txBody>
@@ -1019,7 +1019,7 @@
           </a:p>
           <a:p>
             <a:r>
-              <a:t>Čti body nahlas jeden po druhém a mezi nimi nech pauzu, ať mají čas doplnit, co jim chybí.</a:t>
+              <a:t>Čti body nahlas jeden po druhém a mezi nimi nech pauzu, ať mají čas doplnit, co jim chybí.</a:t>
             </a:r>
           </a:p>
           <a:p/>
@@ -1030,7 +1030,7 @@
           </a:p>
           <a:p>
             <a:r>
-              <a:t>Potíže dělá jen čtvrtý bod — podmínka u hraničního případu. Když ho nemá skoro nikdo, není to selhání třídy, ale znamení, že se k němu musíš vrátit v rozboru na dalším snímku.</a:t>
+              <a:t>Potíže dělá jen čtvrtý bod — podmínka u hraničního případu. Když ho nemá skoro nikdo, není to selhání třídy, ale znamení, že se k němu musíš vrátit v rozboru na dalším snímku.</a:t>
             </a:r>
           </a:p>
           <a:p/>
@@ -1122,12 +1122,12 @@
           </a:p>
           <a:p>
             <a:r>
-              <a:t>Vrať se k úvodní otázce: „Na začátku hodiny jsem slyšel dvě různé odpovědi na logo na plachtě. Kdo změnil názor a proč?“</a:t>
-            </a:r>
-          </a:p>
-          <a:p>
-            <a:r>
-              <a:t>Teprve potom shrň čtyři závěry ze snímku — ale ať je vysloví studenti, ne ty. Ptej se „co se stane s rastrem při zvětšení?“ a doplň jen to, co nezazní.</a:t>
+              <a:t>Vrať se k úvodní otázce: „Na začátku hodiny jsem slyšel dvě různé odpovědi na logo na plachtě. Kdo změnil názor a proč?“</a:t>
+            </a:r>
+          </a:p>
+          <a:p>
+            <a:r>
+              <a:t>Teprve potom shrň čtyři závěry ze snímku — ale ať je vysloví studenti, ne ty. Ptej se „co se stane s rastrem při zvětšení?“ a doplň jen to, co nezazní.</a:t>
             </a:r>
           </a:p>
           <a:p/>
@@ -1143,7 +1143,7 @@
           </a:p>
           <a:p>
             <a:r>
-              <a:t>Vektor: popis tvarů, vykreslí se ostře v jakékoli velikosti, proto loga a ikony.</a:t>
+              <a:t>Vektor: popis tvarů, vykreslí se ostře v jakékoli velikosti, proto loga a ikony.</a:t>
             </a:r>
           </a:p>
           <a:p>
@@ -1164,7 +1164,7 @@
           </a:p>
           <a:p>
             <a:r>
-              <a:t>Hodnoť postup a zdůvodnění, ne shodu s jednou formulací. Student, který řekne „vektor je předpis, ne obrázek“, to pochopil líp než ten, kdo odříká definici ze snímku.</a:t>
+              <a:t>Hodnoť postup a zdůvodnění, ne shodu s jednou formulací. Student, který řekne „vektor je předpis, ne obrázek“, to pochopil líp než ten, kdo odříká definici ze snímku.</a:t>
             </a:r>
           </a:p>
         </p:txBody>
@@ -1245,7 +1245,7 @@
           </a:p>
           <a:p>
             <a:r>
-              <a:t>„Poslední úkol a ten jde každý sám, ne ve dvojici. Kamarád chce logo klubu na tričko i na malou nálepku. Co mu poradíš a proč? Jedna nebo dvě věty vlastními slovy.“</a:t>
+              <a:t>„Poslední úkol a ten jde každý sám, ne ve dvojici. Kamarád chce logo klubu na tričko i na malou nálepku. Co mu poradíš a proč? Jedna nebo dvě věty vlastními slovy.“</a:t>
             </a:r>
           </a:p>
           <a:p/>
@@ -1256,12 +1256,12 @@
           </a:p>
           <a:p>
             <a:r>
-              <a:t>Sbírej u dveří, každý odevzdá lístek. Je to doklad o učení každého jednotlivce — v části B pracovního listu se dvojice kryjí, tady ne.</a:t>
-            </a:r>
-          </a:p>
-          <a:p>
-            <a:r>
-              <a:t>Než odejdeš z učebny, přeběhni lístky očima. Kdo napsal rastr, potřebuje na začátku hodiny 2 minutu navíc.</a:t>
+              <a:t>Sbírej u dveří, každý odevzdá lístek. Je to doklad o učení každého jednotlivce — v části B pracovního listu se dvojice kryjí, tady ne.</a:t>
+            </a:r>
+          </a:p>
+          <a:p>
+            <a:r>
+              <a:t>Než odejdeš z učebny, přeběhni lístky očima. Kdo napsal rastr, potřebuje na začátku hodiny 2 minutu navíc.</a:t>
             </a:r>
           </a:p>
           <a:p/>
@@ -1272,12 +1272,12 @@
           </a:p>
           <a:p>
             <a:r>
-              <a:t>Vektor (SVG), protože z jednoho zdroje se vytiskne tričko i nálepka bez ztráty ostrosti.</a:t>
-            </a:r>
-          </a:p>
-          <a:p>
-            <a:r>
-              <a:t>Uznej i odpověď „vektor a z něj si nechá vyexportovat rastr v potřebné velikosti“ — to je vlastně přesnější popis reálného postupu.</a:t>
+              <a:t>Vektor (SVG), protože z jednoho zdroje se vytiskne tričko i nálepka bez ztráty ostrosti.</a:t>
+            </a:r>
+          </a:p>
+          <a:p>
+            <a:r>
+              <a:t>Uznej i odpověď „vektor a z něj si nechá vyexportovat rastr v potřebné velikosti“ — to je vlastně přesnější popis reálného postupu.</a:t>
             </a:r>
           </a:p>
         </p:txBody>
@@ -4475,7 +4475,7 @@
                 </a:solidFill>
                 <a:latin typeface="Calibri"/>
               </a:rPr>
-              <a:t>Rastrová a vektorová grafika</a:t>
+              <a:t>Rastrová a vektorová grafika</a:t>
             </a:r>
           </a:p>
         </p:txBody>
@@ -4514,7 +4514,7 @@
                 </a:solidFill>
                 <a:latin typeface="Calibri"/>
               </a:rPr>
-              <a:t>Student rozliší rastrový a vektorový obrázek, vysvětlí, co se s každým stane při zvětšení, a vybere vhodný typ pro zadané použití.</a:t>
+              <a:t>Student rozliší rastrový a vektorový obrázek, vysvětlí, co se s každým stane při zvětšení, a vybere vhodný typ pro zadané použití.</a:t>
             </a:r>
           </a:p>
         </p:txBody>
@@ -4839,7 +4839,7 @@
                 </a:solidFill>
                 <a:latin typeface="Calibri"/>
               </a:rPr>
-              <a:t>POČÍTAČOVÁ GRAFIKA A PRÁCE S MULTIMÉDII</a:t>
+              <a:t>POČÍTAČOVÁ GRAFIKA A PRÁCE S MULTIMÉDII</a:t>
             </a:r>
           </a:p>
         </p:txBody>
@@ -4913,7 +4913,7 @@
                 </a:solidFill>
                 <a:latin typeface="Calibri"/>
               </a:rPr>
-              <a:t>Logo školy má být na vizitce i na plachtě 3 × 2 m. Jaký soubor si vyžádáš od grafika?</a:t>
+              <a:t>Logo školy má být na vizitce i na plachtě 3 × 2 m. Jaký soubor si vyžádáš od grafika?</a:t>
             </a:r>
           </a:p>
         </p:txBody>
@@ -4987,7 +4987,7 @@
                 </a:solidFill>
                 <a:latin typeface="Calibri"/>
               </a:rPr>
-              <a:t>Zapiš svou volbu a jeden konkrétní důvod.</a:t>
+              <a:t>Zapiš svou volbu a jeden konkrétní důvod.</a:t>
             </a:r>
           </a:p>
         </p:txBody>
@@ -5381,7 +5381,7 @@
                 </a:solidFill>
                 <a:latin typeface="Calibri"/>
               </a:rPr>
-              <a:t>POČÍTAČOVÁ GRAFIKA A PRÁCE S MULTIMÉDII</a:t>
+              <a:t>POČÍTAČOVÁ GRAFIKA A PRÁCE S MULTIMÉDII</a:t>
             </a:r>
           </a:p>
         </p:txBody>
@@ -5569,7 +5569,7 @@
                 </a:solidFill>
                 <a:latin typeface="Calibri"/>
               </a:rPr>
-              <a:t>Mřížka pixelů. Každý pixel má svou barvu. Počet pixelů je dán při vzniku a nelze ho doplnit.</a:t>
+              <a:t>Mřížka pixelů. Každý pixel má svou barvu. Počet pixelů je dán při vzniku a nelze ho doplnit.</a:t>
             </a:r>
           </a:p>
         </p:txBody>
@@ -5722,7 +5722,7 @@
                 </a:solidFill>
                 <a:latin typeface="Calibri"/>
               </a:rPr>
-              <a:t>Matematický popis tvarů — body, křivky, výplně. Vykresluje se až při zobrazení, proto je ostrý v každé velikosti.</a:t>
+              <a:t>Matematický popis tvarů — body, křivky, výplně. Vykresluje se až při zobrazení, proto je ostrý v každé velikosti.</a:t>
             </a:r>
           </a:p>
         </p:txBody>
@@ -5875,7 +5875,7 @@
                 </a:solidFill>
                 <a:latin typeface="Calibri"/>
               </a:rPr>
-              <a:t>Fotografie a skeny patří rastru. Loga, ikony a schémata patří vektoru.</a:t>
+              <a:t>Fotografie a skeny patří rastru. Loga, ikony a schémata patří vektoru.</a:t>
             </a:r>
           </a:p>
         </p:txBody>
@@ -5954,7 +5954,7 @@
                 </a:solidFill>
                 <a:latin typeface="Calibri"/>
               </a:rPr>
-              <a:t>Zvětšení neumí doplnit informaci, která v souboru není.</a:t>
+              <a:t>Zvětšení neumí doplnit informaci, která v souboru není.</a:t>
             </a:r>
           </a:p>
         </p:txBody>
@@ -6165,7 +6165,7 @@
                 </a:solidFill>
                 <a:latin typeface="Calibri"/>
               </a:rPr>
-              <a:t>POČÍTAČOVÁ GRAFIKA A PRÁCE S MULTIMÉDII</a:t>
+              <a:t>POČÍTAČOVÁ GRAFIKA A PRÁCE S MULTIMÉDII</a:t>
             </a:r>
           </a:p>
         </p:txBody>
@@ -6270,7 +6270,7 @@
                 </a:solidFill>
                 <a:latin typeface="Calibri"/>
               </a:rPr>
-              <a:t>Laboratoř – rastr a vektor.html, Rastr a vektor.txt</a:t>
+              <a:t>Laboratoř – rastr a vektor.html, Rastr a vektor.txt</a:t>
             </a:r>
           </a:p>
         </p:txBody>
@@ -6340,7 +6340,7 @@
                 </a:solidFill>
                 <a:latin typeface="Calibri"/>
               </a:rPr>
-              <a:t>Pozoruj v laboratoři</a:t>
+              <a:t>Pozoruj v laboratoři</a:t>
             </a:r>
           </a:p>
         </p:txBody>
@@ -6379,7 +6379,7 @@
                 </a:solidFill>
                 <a:latin typeface="Calibri"/>
               </a:rPr>
-              <a:t>V modulu 01 táhni posuvníkem na 800 % a sleduj okraje obou obrázků.</a:t>
+              <a:t>V modulu 01 táhni posuvníkem na 800 % a sleduj okraje obou obrázků.</a:t>
             </a:r>
           </a:p>
         </p:txBody>
@@ -6488,7 +6488,7 @@
                 </a:solidFill>
                 <a:latin typeface="Calibri"/>
               </a:rPr>
-              <a:t>Otevři rastr_64px.png a logo_vektor.svg. Zapiš velikosti a co vidíš.</a:t>
+              <a:t>Otevři rastr_64px.png a logo_vektor.svg. Zapiš velikosti a co vidíš.</a:t>
             </a:r>
           </a:p>
         </p:txBody>
@@ -6597,7 +6597,7 @@
                 </a:solidFill>
                 <a:latin typeface="Calibri"/>
               </a:rPr>
-              <a:t>V části B pracovního listu urči u každého rastr, nebo vektor, a napiš proč.</a:t>
+              <a:t>V části B pracovního listu urči u každého rastr, nebo vektor, a napiš proč.</a:t>
             </a:r>
           </a:p>
         </p:txBody>
@@ -6711,7 +6711,7 @@
                 </a:solidFill>
                 <a:latin typeface="Calibri"/>
               </a:rPr>
-              <a:t>Vyplněné části A a B pracovního listu a zdůvodnění u všech šesti zadání.</a:t>
+              <a:t>Vyplněné části A a B pracovního listu a zdůvodnění u všech šesti zadání.</a:t>
             </a:r>
           </a:p>
         </p:txBody>
@@ -6922,7 +6922,7 @@
                 </a:solidFill>
                 <a:latin typeface="Calibri"/>
               </a:rPr>
-              <a:t>POČÍTAČOVÁ GRAFIKA A PRÁCE S MULTIMÉDII</a:t>
+              <a:t>POČÍTAČOVÁ GRAFIKA A PRÁCE S MULTIMÉDII</a:t>
             </a:r>
           </a:p>
         </p:txBody>
@@ -7031,7 +7031,7 @@
                 </a:solidFill>
                 <a:latin typeface="Calibri"/>
               </a:rPr>
-              <a:t>U každého ze šesti zadání máš napsané zdůvodnění, ne jen slovo rastr nebo vektor.</a:t>
+              <a:t>U každého ze šesti zadání máš napsané zdůvodnění, ne jen slovo rastr nebo vektor.</a:t>
             </a:r>
           </a:p>
         </p:txBody>
@@ -7179,7 +7179,7 @@
                 </a:solidFill>
                 <a:latin typeface="Calibri"/>
               </a:rPr>
-              <a:t>Zapsal jsi velikosti obou souborů a všiml sis rozdílu.</a:t>
+              <a:t>Zapsal jsi velikosti obou souborů a všiml sis rozdílu.</a:t>
             </a:r>
           </a:p>
         </p:txBody>
@@ -7253,7 +7253,7 @@
                 </a:solidFill>
                 <a:latin typeface="Calibri"/>
               </a:rPr>
-              <a:t>U hraničního případu jsi uvedl podmínku, za které by platila druhá odpověď.</a:t>
+              <a:t>U hraničního případu jsi uvedl podmínku, za které by platila druhá odpověď.</a:t>
             </a:r>
           </a:p>
         </p:txBody>
@@ -7385,7 +7385,7 @@
                 </a:solidFill>
                 <a:latin typeface="Calibri"/>
               </a:rPr>
-              <a:t>Co si z hodiny odnést</a:t>
+              <a:t>Co si z hodiny odnést</a:t>
             </a:r>
           </a:p>
         </p:txBody>
@@ -7464,7 +7464,7 @@
                 </a:solidFill>
                 <a:latin typeface="Calibri"/>
               </a:rPr>
-              <a:t>POČÍTAČOVÁ GRAFIKA A PRÁCE S MULTIMÉDII</a:t>
+              <a:t>POČÍTAČOVÁ GRAFIKA A PRÁCE S MULTIMÉDII</a:t>
             </a:r>
           </a:p>
         </p:txBody>
@@ -7691,7 +7691,7 @@
                 </a:solidFill>
                 <a:latin typeface="Calibri"/>
               </a:rPr>
-              <a:t>Popis tvarů. Vykreslí se v jakékoli velikosti ostře, proto se hodí na loga a ikony.</a:t>
+              <a:t>Popis tvarů. Vykreslí se v jakékoli velikosti ostře, proto se hodí na loga a ikony.</a:t>
             </a:r>
           </a:p>
         </p:txBody>
@@ -8068,7 +8068,7 @@
                 </a:solidFill>
                 <a:latin typeface="Calibri"/>
               </a:rPr>
-              <a:t>POČÍTAČOVÁ GRAFIKA A PRÁCE S MULTIMÉDII</a:t>
+              <a:t>POČÍTAČOVÁ GRAFIKA A PRÁCE S MULTIMÉDII</a:t>
             </a:r>
           </a:p>
         </p:txBody>
@@ -8177,7 +8177,7 @@
                 </a:solidFill>
                 <a:latin typeface="Calibri"/>
               </a:rPr>
-              <a:t>Kamarád chce logo klubu na tričko i na malou nálepku. Co mu doporučíš a proč?</a:t>
+              <a:t>Kamarád chce logo klubu na tričko i na malou nálepku. Co mu doporučíš a proč?</a:t>
             </a:r>
           </a:p>
         </p:txBody>
